--- a/public/fun/pack/pptx/news/카드뉴스_16_알뜰생활팁_평상수박.pptx
+++ b/public/fun/pack/pptx/news/카드뉴스_16_알뜰생활팁_평상수박.pptx
@@ -3348,7 +3348,7 @@
             <a:r>
               <a:rPr sz="3000" b="1" i="0">
                 <a:solidFill>
-                  <a:srgbClr val="153C26"/>
+                  <a:srgbClr val="115F59"/>
                 </a:solidFill>
               </a:rPr>
               <a:t>한 달 용돈, 어디로 갔을까요</a:t>
@@ -3386,7 +3386,7 @@
             <a:r>
               <a:rPr sz="1500" b="0" i="1">
                 <a:solidFill>
-                  <a:srgbClr val="153C26"/>
+                  <a:srgbClr val="115F59"/>
                 </a:solidFill>
               </a:rPr>
               <a:t>옆으로 넘겨 보세요 →</a:t>
@@ -3446,7 +3446,7 @@
     <p:bg>
       <p:bgPr>
         <a:solidFill>
-          <a:srgbClr val="F0FAF4"/>
+          <a:srgbClr val="EEFCFB"/>
         </a:solidFill>
         <a:effectLst/>
       </p:bgPr>
@@ -3475,7 +3475,7 @@
           <a:noFill/>
           <a:ln w="28575">
             <a:solidFill>
-              <a:srgbClr val="308854"/>
+              <a:srgbClr val="26C5B8"/>
             </a:solidFill>
           </a:ln>
         </p:spPr>
@@ -3504,7 +3504,7 @@
           <a:noFill/>
           <a:ln w="9525">
             <a:solidFill>
-              <a:srgbClr val="D0F1DE"/>
+              <a:srgbClr val="D1FAF7"/>
             </a:solidFill>
           </a:ln>
         </p:spPr>
@@ -3546,7 +3546,7 @@
             <a:r>
               <a:rPr sz="2600" b="1" i="0">
                 <a:solidFill>
-                  <a:srgbClr val="153C26"/>
+                  <a:srgbClr val="115F59"/>
                 </a:solidFill>
               </a:rPr>
               <a:t>이번 달 고정지출부터 적어요</a:t>
@@ -3584,7 +3584,7 @@
             <a:r>
               <a:rPr sz="6600" b="1" i="0">
                 <a:solidFill>
-                  <a:srgbClr val="308854"/>
+                  <a:srgbClr val="26C5B8"/>
                 </a:solidFill>
               </a:rPr>
               <a:t>01</a:t>
@@ -3682,7 +3682,7 @@
     <p:bg>
       <p:bgPr>
         <a:solidFill>
-          <a:srgbClr val="F0FAF4"/>
+          <a:srgbClr val="EEFCFB"/>
         </a:solidFill>
         <a:effectLst/>
       </p:bgPr>
@@ -3711,7 +3711,7 @@
           <a:noFill/>
           <a:ln w="28575">
             <a:solidFill>
-              <a:srgbClr val="308854"/>
+              <a:srgbClr val="26C5B8"/>
             </a:solidFill>
           </a:ln>
         </p:spPr>
@@ -3740,7 +3740,7 @@
           <a:noFill/>
           <a:ln w="9525">
             <a:solidFill>
-              <a:srgbClr val="D0F1DE"/>
+              <a:srgbClr val="D1FAF7"/>
             </a:solidFill>
           </a:ln>
         </p:spPr>
@@ -3782,7 +3782,7 @@
             <a:r>
               <a:rPr sz="2600" b="1" i="0">
                 <a:solidFill>
-                  <a:srgbClr val="153C26"/>
+                  <a:srgbClr val="115F59"/>
                 </a:solidFill>
               </a:rPr>
               <a:t>카드 대신 현금 한 주</a:t>
@@ -3820,7 +3820,7 @@
             <a:r>
               <a:rPr sz="6600" b="1" i="0">
                 <a:solidFill>
-                  <a:srgbClr val="308854"/>
+                  <a:srgbClr val="26C5B8"/>
                 </a:solidFill>
               </a:rPr>
               <a:t>02</a:t>
@@ -3918,7 +3918,7 @@
     <p:bg>
       <p:bgPr>
         <a:solidFill>
-          <a:srgbClr val="F0FAF4"/>
+          <a:srgbClr val="EEFCFB"/>
         </a:solidFill>
         <a:effectLst/>
       </p:bgPr>
@@ -3947,7 +3947,7 @@
           <a:noFill/>
           <a:ln w="28575">
             <a:solidFill>
-              <a:srgbClr val="308854"/>
+              <a:srgbClr val="26C5B8"/>
             </a:solidFill>
           </a:ln>
         </p:spPr>
@@ -3976,7 +3976,7 @@
           <a:noFill/>
           <a:ln w="9525">
             <a:solidFill>
-              <a:srgbClr val="D0F1DE"/>
+              <a:srgbClr val="D1FAF7"/>
             </a:solidFill>
           </a:ln>
         </p:spPr>
@@ -4018,7 +4018,7 @@
             <a:r>
               <a:rPr sz="2600" b="1" i="0">
                 <a:solidFill>
-                  <a:srgbClr val="153C26"/>
+                  <a:srgbClr val="115F59"/>
                 </a:solidFill>
               </a:rPr>
               <a:t>장보기 전 냉장고 사진</a:t>
@@ -4056,7 +4056,7 @@
             <a:r>
               <a:rPr sz="6600" b="1" i="0">
                 <a:solidFill>
-                  <a:srgbClr val="308854"/>
+                  <a:srgbClr val="26C5B8"/>
                 </a:solidFill>
               </a:rPr>
               <a:t>03</a:t>
@@ -4154,7 +4154,7 @@
     <p:bg>
       <p:bgPr>
         <a:solidFill>
-          <a:srgbClr val="F0FAF4"/>
+          <a:srgbClr val="EEFCFB"/>
         </a:solidFill>
         <a:effectLst/>
       </p:bgPr>
@@ -4183,7 +4183,7 @@
           <a:noFill/>
           <a:ln w="28575">
             <a:solidFill>
-              <a:srgbClr val="308854"/>
+              <a:srgbClr val="26C5B8"/>
             </a:solidFill>
           </a:ln>
         </p:spPr>
@@ -4212,7 +4212,7 @@
           <a:noFill/>
           <a:ln w="9525">
             <a:solidFill>
-              <a:srgbClr val="D0F1DE"/>
+              <a:srgbClr val="D1FAF7"/>
             </a:solidFill>
           </a:ln>
         </p:spPr>
@@ -4254,7 +4254,7 @@
             <a:r>
               <a:rPr sz="2600" b="1" i="0">
                 <a:solidFill>
-                  <a:srgbClr val="153C26"/>
+                  <a:srgbClr val="115F59"/>
                 </a:solidFill>
               </a:rPr>
               <a:t>작은 목표 통장 만들기</a:t>
@@ -4292,7 +4292,7 @@
             <a:r>
               <a:rPr sz="6600" b="1" i="0">
                 <a:solidFill>
-                  <a:srgbClr val="308854"/>
+                  <a:srgbClr val="26C5B8"/>
                 </a:solidFill>
               </a:rPr>
               <a:t>04</a:t>
@@ -4390,7 +4390,7 @@
     <p:bg>
       <p:bgPr>
         <a:solidFill>
-          <a:srgbClr val="F0FAF4"/>
+          <a:srgbClr val="EEFCFB"/>
         </a:solidFill>
         <a:effectLst/>
       </p:bgPr>
@@ -4419,7 +4419,7 @@
           <a:noFill/>
           <a:ln w="28575">
             <a:solidFill>
-              <a:srgbClr val="308854"/>
+              <a:srgbClr val="26C5B8"/>
             </a:solidFill>
           </a:ln>
         </p:spPr>
@@ -4448,7 +4448,7 @@
           <a:noFill/>
           <a:ln w="9525">
             <a:solidFill>
-              <a:srgbClr val="D0F1DE"/>
+              <a:srgbClr val="D1FAF7"/>
             </a:solidFill>
           </a:ln>
         </p:spPr>
@@ -4490,7 +4490,7 @@
             <a:r>
               <a:rPr sz="2600" b="1" i="0">
                 <a:solidFill>
-                  <a:srgbClr val="153C26"/>
+                  <a:srgbClr val="115F59"/>
                 </a:solidFill>
               </a:rPr>
               <a:t>주말 5분 가계부</a:t>
@@ -4528,7 +4528,7 @@
             <a:r>
               <a:rPr sz="6600" b="1" i="0">
                 <a:solidFill>
-                  <a:srgbClr val="308854"/>
+                  <a:srgbClr val="26C5B8"/>
                 </a:solidFill>
               </a:rPr>
               <a:t>05</a:t>
@@ -4684,7 +4684,7 @@
             <a:r>
               <a:rPr sz="2800" b="1" i="0">
                 <a:solidFill>
-                  <a:srgbClr val="153C26"/>
+                  <a:srgbClr val="115F59"/>
                 </a:solidFill>
               </a:rPr>
               <a:t>저장해 두고 필요할 때 꺼내 보세요</a:t>
@@ -4722,7 +4722,7 @@
             <a:r>
               <a:rPr sz="1500" b="0" i="1">
                 <a:solidFill>
-                  <a:srgbClr val="153C26"/>
+                  <a:srgbClr val="115F59"/>
                 </a:solidFill>
               </a:rPr>
               <a:t>마음에 들면 공유해 주세요</a:t>
@@ -4787,34 +4787,34 @@
         <a:sysClr val="window" lastClr="FFFFFF"/>
       </a:lt1>
       <a:dk2>
-        <a:srgbClr val="153C26"/>
+        <a:srgbClr val="115F59"/>
       </a:dk2>
       <a:lt2>
-        <a:srgbClr val="F0FAF4"/>
+        <a:srgbClr val="EEFCFB"/>
       </a:lt2>
       <a:accent1>
-        <a:srgbClr val="308854"/>
+        <a:srgbClr val="26C5B8"/>
       </a:accent1>
       <a:accent2>
-        <a:srgbClr val="8A3B91"/>
+        <a:srgbClr val="209DB6"/>
       </a:accent2>
       <a:accent3>
-        <a:srgbClr val="153C26"/>
+        <a:srgbClr val="115F59"/>
       </a:accent3>
       <a:accent4>
-        <a:srgbClr val="D0F1DE"/>
+        <a:srgbClr val="D1FAF7"/>
       </a:accent4>
       <a:accent5>
-        <a:srgbClr val="5D6272"/>
+        <a:srgbClr val="23B1B7"/>
       </a:accent5>
       <a:accent6>
-        <a:srgbClr val="738A7D"/>
+        <a:srgbClr val="709F9B"/>
       </a:accent6>
       <a:hlink>
-        <a:srgbClr val="308854"/>
+        <a:srgbClr val="26C5B8"/>
       </a:hlink>
       <a:folHlink>
-        <a:srgbClr val="153C26"/>
+        <a:srgbClr val="115F59"/>
       </a:folHlink>
     </a:clrScheme>
     <a:fontScheme name="Office">

--- a/public/fun/pack/pptx/news/카드뉴스_16_알뜰생활팁_평상수박.pptx
+++ b/public/fun/pack/pptx/news/카드뉴스_16_알뜰생활팁_평상수박.pptx
@@ -3287,6 +3287,14 @@
 <file path=ppt/slides/slide1.xml><?xml version="1.0" encoding="utf-8"?>
 <p:sld xmlns:a="http://schemas.openxmlformats.org/drawingml/2006/main" xmlns:p="http://schemas.openxmlformats.org/presentationml/2006/main" xmlns:r="http://schemas.openxmlformats.org/officeDocument/2006/relationships">
   <p:cSld>
+    <p:bg>
+      <p:bgPr>
+        <a:solidFill>
+          <a:srgbClr val="274935"/>
+        </a:solidFill>
+        <a:effectLst/>
+      </p:bgPr>
+    </p:bg>
     <p:spTree>
       <p:nvGrpSpPr>
         <p:cNvPr id="1" name=""/>
@@ -3294,30 +3302,102 @@
         <p:nvPr/>
       </p:nvGrpSpPr>
       <p:grpSpPr/>
-      <p:pic>
-        <p:nvPicPr>
-          <p:cNvPr id="3" name="표지 그림" descr="news-16.jpg"/>
-          <p:cNvPicPr>
-            <a:picLocks noChangeAspect="1"/>
-          </p:cNvPicPr>
+      <p:sp>
+        <p:nvSpPr>
+          <p:cNvPr id="3" name="장식"/>
+          <p:cNvSpPr/>
           <p:nvPr/>
-        </p:nvPicPr>
-        <p:blipFill>
-          <a:blip r:embed="rId2"/>
-          <a:stretch>
-            <a:fillRect/>
-          </a:stretch>
-        </p:blipFill>
-        <p:spPr>
-          <a:xfrm>
-            <a:off x="0" y="0"/>
-            <a:ext cx="6858000" cy="6858000"/>
+        </p:nvSpPr>
+        <p:spPr>
+          <a:xfrm>
+            <a:off x="1600200" y="822960"/>
+            <a:ext cx="3657600" cy="3657600"/>
+          </a:xfrm>
+          <a:prstGeom prst="ellipse">
+            <a:avLst/>
+          </a:prstGeom>
+          <a:solidFill>
+            <a:srgbClr val="7BEAA9"/>
+          </a:solidFill>
+          <a:ln>
+            <a:noFill/>
+          </a:ln>
+        </p:spPr>
+        <p:txBody>
+          <a:bodyPr rtlCol="0" anchor="ctr"/>
+          <a:lstStyle/>
+          <a:p>
+            <a:pPr algn="ctr"/>
+          </a:p>
+        </p:txBody>
+      </p:sp>
+      <p:sp>
+        <p:nvSpPr>
+          <p:cNvPr id="4" name="장식"/>
+          <p:cNvSpPr/>
+          <p:nvPr/>
+        </p:nvSpPr>
+        <p:spPr>
+          <a:xfrm>
+            <a:off x="3246120" y="502920"/>
+            <a:ext cx="822960" cy="822960"/>
+          </a:xfrm>
+          <a:prstGeom prst="ellipse">
+            <a:avLst/>
+          </a:prstGeom>
+          <a:solidFill>
+            <a:srgbClr val="5EB280"/>
+          </a:solidFill>
+          <a:ln>
+            <a:noFill/>
+          </a:ln>
+        </p:spPr>
+        <p:txBody>
+          <a:bodyPr rtlCol="0" anchor="ctr"/>
+          <a:lstStyle/>
+          <a:p>
+            <a:pPr algn="ctr"/>
+          </a:p>
+        </p:txBody>
+      </p:sp>
+      <p:sp>
+        <p:nvSpPr>
+          <p:cNvPr id="5" name="라벨"/>
+          <p:cNvSpPr txBox="1"/>
+          <p:nvPr/>
+        </p:nvSpPr>
+        <p:spPr>
+          <a:xfrm>
+            <a:off x="731520" y="4572000"/>
+            <a:ext cx="5394960" cy="274320"/>
           </a:xfrm>
           <a:prstGeom prst="rect">
             <a:avLst/>
           </a:prstGeom>
-        </p:spPr>
-      </p:pic>
+          <a:noFill/>
+        </p:spPr>
+        <p:txBody>
+          <a:bodyPr wrap="square" lIns="54864" rIns="54864" tIns="27432" bIns="27432" anchor="t">
+            <a:noAutofit/>
+          </a:bodyPr>
+          <a:lstStyle/>
+          <a:p>
+            <a:pPr algn="ctr">
+              <a:lnSpc>
+                <a:spcPct val="115000"/>
+              </a:lnSpc>
+            </a:pPr>
+            <a:r>
+              <a:rPr sz="1000" b="1" i="0" spc="250">
+                <a:solidFill>
+                  <a:srgbClr val="FFFFFF"/>
+                </a:solidFill>
+              </a:rPr>
+              <a:t>CARD NEWS</a:t>
+            </a:r>
+          </a:p>
+        </p:txBody>
+      </p:sp>
       <p:sp>
         <p:nvSpPr>
           <p:cNvPr id="2" name="Title 1"/>
@@ -3330,8 +3410,8 @@
         </p:nvSpPr>
         <p:spPr>
           <a:xfrm>
-            <a:off x="685800" y="960120"/>
-            <a:ext cx="5486400" cy="1463040"/>
+            <a:off x="731520" y="4892040"/>
+            <a:ext cx="5394960" cy="914400"/>
           </a:xfrm>
         </p:spPr>
         <p:txBody>
@@ -3340,7 +3420,7 @@
           </a:bodyPr>
           <a:lstStyle/>
           <a:p>
-            <a:pPr algn="l">
+            <a:pPr algn="ctr">
               <a:lnSpc>
                 <a:spcPct val="105000"/>
               </a:lnSpc>
@@ -3348,24 +3428,24 @@
             <a:r>
               <a:rPr sz="3000" b="1" i="0">
                 <a:solidFill>
-                  <a:srgbClr val="126861"/>
+                  <a:srgbClr val="FFFFFF"/>
                 </a:solidFill>
               </a:rPr>
-              <a:t>한 달 용돈, 어디로 갔을까요</a:t>
-            </a:r>
-          </a:p>
-        </p:txBody>
-      </p:sp>
-      <p:sp>
-        <p:nvSpPr>
-          <p:cNvPr id="4" name="한 줄 문구"/>
+              <a:t>용돈, 어디로 갔을까요</a:t>
+            </a:r>
+          </a:p>
+        </p:txBody>
+      </p:sp>
+      <p:sp>
+        <p:nvSpPr>
+          <p:cNvPr id="6" name="한 줄 문구"/>
           <p:cNvSpPr txBox="1"/>
           <p:nvPr/>
         </p:nvSpPr>
         <p:spPr>
           <a:xfrm>
-            <a:off x="685800" y="2560320"/>
-            <a:ext cx="5486400" cy="822960"/>
+            <a:off x="731520" y="5806440"/>
+            <a:ext cx="5394960" cy="822960"/>
           </a:xfrm>
           <a:prstGeom prst="rect">
             <a:avLst/>
@@ -3378,15 +3458,15 @@
           </a:bodyPr>
           <a:lstStyle/>
           <a:p>
-            <a:pPr algn="l">
+            <a:pPr algn="ctr">
               <a:lnSpc>
                 <a:spcPct val="115000"/>
               </a:lnSpc>
             </a:pPr>
             <a:r>
-              <a:rPr sz="1500" b="0" i="1">
+              <a:rPr sz="1500" b="0" i="0">
                 <a:solidFill>
-                  <a:srgbClr val="126861"/>
+                  <a:srgbClr val="FFFFFF"/>
                 </a:solidFill>
               </a:rPr>
               <a:t>옆으로 넘겨 보세요 →</a:t>
@@ -3396,14 +3476,14 @@
       </p:sp>
       <p:sp>
         <p:nvSpPr>
-          <p:cNvPr id="5" name="안내 문구"/>
+          <p:cNvPr id="7" name="안내 문구"/>
           <p:cNvSpPr txBox="1"/>
           <p:nvPr/>
         </p:nvSpPr>
         <p:spPr>
           <a:xfrm>
-            <a:off x="685800" y="3429000"/>
-            <a:ext cx="5486400" cy="914400"/>
+            <a:off x="731520" y="6675120"/>
+            <a:ext cx="5394960" cy="914400"/>
           </a:xfrm>
           <a:prstGeom prst="rect">
             <a:avLst/>
@@ -3416,7 +3496,7 @@
           </a:bodyPr>
           <a:lstStyle/>
           <a:p>
-            <a:pPr algn="l">
+            <a:pPr algn="ctr">
               <a:lnSpc>
                 <a:spcPct val="115000"/>
               </a:lnSpc>
@@ -3424,7 +3504,7 @@
             <a:r>
               <a:rPr sz="1200" b="0" i="0">
                 <a:solidFill>
-                  <a:srgbClr val="666666"/>
+                  <a:srgbClr val="FFFFFF"/>
                 </a:solidFill>
               </a:rPr>
               <a:t>알뜰 생활 팁 · 카드뉴스</a:t>
@@ -3446,7 +3526,7 @@
     <p:bg>
       <p:bgPr>
         <a:solidFill>
-          <a:srgbClr val="F4FDFD"/>
+          <a:srgbClr val="EAFDF2"/>
         </a:solidFill>
         <a:effectLst/>
       </p:bgPr>
@@ -3466,46 +3546,84 @@
         </p:nvSpPr>
         <p:spPr>
           <a:xfrm>
-            <a:off x="256032" y="256032"/>
-            <a:ext cx="6345936" cy="6345936"/>
+            <a:off x="640080" y="6400800"/>
+            <a:ext cx="5577840" cy="10972"/>
+          </a:xfrm>
+          <a:prstGeom prst="rect">
+            <a:avLst/>
+          </a:prstGeom>
+          <a:solidFill>
+            <a:srgbClr val="26231F"/>
+          </a:solidFill>
+          <a:ln>
+            <a:noFill/>
+          </a:ln>
+        </p:spPr>
+        <p:txBody>
+          <a:bodyPr rtlCol="0" anchor="ctr"/>
+          <a:lstStyle/>
+          <a:p>
+            <a:pPr algn="ctr"/>
+          </a:p>
+        </p:txBody>
+      </p:sp>
+      <p:sp>
+        <p:nvSpPr>
+          <p:cNvPr id="4" name="하단 라벨"/>
+          <p:cNvSpPr txBox="1"/>
+          <p:nvPr/>
+        </p:nvSpPr>
+        <p:spPr>
+          <a:xfrm>
+            <a:off x="640080" y="6437376"/>
+            <a:ext cx="5486400" cy="274320"/>
           </a:xfrm>
           <a:prstGeom prst="rect">
             <a:avLst/>
           </a:prstGeom>
           <a:noFill/>
-          <a:ln w="28575">
-            <a:solidFill>
-              <a:srgbClr val="3EE0D2"/>
-            </a:solidFill>
-          </a:ln>
-        </p:spPr>
-        <p:txBody>
-          <a:bodyPr rtlCol="0" anchor="ctr"/>
-          <a:lstStyle/>
-          <a:p>
-            <a:pPr algn="ctr"/>
-          </a:p>
-        </p:txBody>
-      </p:sp>
-      <p:sp>
-        <p:nvSpPr>
-          <p:cNvPr id="4" name="장식"/>
+        </p:spPr>
+        <p:txBody>
+          <a:bodyPr wrap="square" lIns="54864" rIns="54864" tIns="27432" bIns="27432" anchor="ctr">
+            <a:noAutofit/>
+          </a:bodyPr>
+          <a:lstStyle/>
+          <a:p>
+            <a:pPr algn="l">
+              <a:lnSpc>
+                <a:spcPct val="115000"/>
+              </a:lnSpc>
+            </a:pPr>
+            <a:r>
+              <a:rPr sz="900" b="1" i="0" spc="250">
+                <a:solidFill>
+                  <a:srgbClr val="26231F"/>
+                </a:solidFill>
+              </a:rPr>
+              <a:t>CARD NEWS</a:t>
+            </a:r>
+          </a:p>
+        </p:txBody>
+      </p:sp>
+      <p:sp>
+        <p:nvSpPr>
+          <p:cNvPr id="5" name="포인트"/>
           <p:cNvSpPr/>
           <p:nvPr/>
         </p:nvSpPr>
         <p:spPr>
           <a:xfrm>
-            <a:off x="384048" y="384048"/>
-            <a:ext cx="6089904" cy="6089904"/>
-          </a:xfrm>
-          <a:prstGeom prst="rect">
+            <a:off x="5879592" y="6473952"/>
+            <a:ext cx="219456" cy="219456"/>
+          </a:xfrm>
+          <a:prstGeom prst="moon">
             <a:avLst/>
           </a:prstGeom>
-          <a:noFill/>
-          <a:ln w="9525">
-            <a:solidFill>
-              <a:srgbClr val="D9FCF9"/>
-            </a:solidFill>
+          <a:solidFill>
+            <a:srgbClr val="7BEAA9"/>
+          </a:solidFill>
+          <a:ln>
+            <a:noFill/>
           </a:ln>
         </p:spPr>
         <p:txBody>
@@ -3528,8 +3646,8 @@
         </p:nvSpPr>
         <p:spPr>
           <a:xfrm>
-            <a:off x="822960" y="548640"/>
-            <a:ext cx="3931920" cy="822960"/>
+            <a:off x="640080" y="502920"/>
+            <a:ext cx="5577840" cy="914400"/>
           </a:xfrm>
         </p:spPr>
         <p:txBody>
@@ -3546,7 +3664,7 @@
             <a:r>
               <a:rPr sz="2600" b="1" i="0">
                 <a:solidFill>
-                  <a:srgbClr val="126861"/>
+                  <a:srgbClr val="26231F"/>
                 </a:solidFill>
               </a:rPr>
               <a:t>이번 달 고정지출부터 적어요</a:t>
@@ -3556,13 +3674,13 @@
       </p:sp>
       <p:sp>
         <p:nvSpPr>
-          <p:cNvPr id="5" name="번호"/>
+          <p:cNvPr id="6" name="번호"/>
           <p:cNvSpPr txBox="1"/>
           <p:nvPr/>
         </p:nvSpPr>
         <p:spPr>
           <a:xfrm>
-            <a:off x="822960" y="1645920"/>
+            <a:off x="640080" y="1691640"/>
             <a:ext cx="2194560" cy="1280160"/>
           </a:xfrm>
           <a:prstGeom prst="rect">
@@ -3584,7 +3702,7 @@
             <a:r>
               <a:rPr sz="6600" b="1" i="0">
                 <a:solidFill>
-                  <a:srgbClr val="3EE0D2"/>
+                  <a:srgbClr val="7BEAA9"/>
                 </a:solidFill>
               </a:rPr>
               <a:t>01</a:t>
@@ -3594,14 +3712,14 @@
       </p:sp>
       <p:sp>
         <p:nvSpPr>
-          <p:cNvPr id="6" name="본문"/>
+          <p:cNvPr id="7" name="본문"/>
           <p:cNvSpPr txBox="1"/>
           <p:nvPr/>
         </p:nvSpPr>
         <p:spPr>
           <a:xfrm>
-            <a:off x="822960" y="3108960"/>
-            <a:ext cx="5212079" cy="2651760"/>
+            <a:off x="640080" y="3154680"/>
+            <a:ext cx="5577840" cy="2651760"/>
           </a:xfrm>
           <a:prstGeom prst="rect">
             <a:avLst/>
@@ -3622,7 +3740,7 @@
             <a:r>
               <a:rPr sz="2800" b="0" i="0">
                 <a:solidFill>
-                  <a:srgbClr val="2B2B2B"/>
+                  <a:srgbClr val="26231F"/>
                 </a:solidFill>
               </a:rPr>
               <a:t>월세·통신비·구독료처럼 매달 나가는 돈부터 한곳에 적어 보면 새는 곳이 보여요.</a:t>
@@ -3632,14 +3750,14 @@
       </p:sp>
       <p:sp>
         <p:nvSpPr>
-          <p:cNvPr id="7" name="쪽 번호"/>
+          <p:cNvPr id="8" name="쪽 번호"/>
           <p:cNvSpPr txBox="1"/>
           <p:nvPr/>
         </p:nvSpPr>
         <p:spPr>
           <a:xfrm>
-            <a:off x="822960" y="5806440"/>
-            <a:ext cx="5212079" cy="365760"/>
+            <a:off x="640080" y="5806440"/>
+            <a:ext cx="5577840" cy="365760"/>
           </a:xfrm>
           <a:prstGeom prst="rect">
             <a:avLst/>
@@ -3682,7 +3800,7 @@
     <p:bg>
       <p:bgPr>
         <a:solidFill>
-          <a:srgbClr val="F4FDFD"/>
+          <a:srgbClr val="EAFDF2"/>
         </a:solidFill>
         <a:effectLst/>
       </p:bgPr>
@@ -3702,46 +3820,84 @@
         </p:nvSpPr>
         <p:spPr>
           <a:xfrm>
-            <a:off x="256032" y="256032"/>
-            <a:ext cx="6345936" cy="6345936"/>
+            <a:off x="640080" y="6400800"/>
+            <a:ext cx="5577840" cy="10972"/>
+          </a:xfrm>
+          <a:prstGeom prst="rect">
+            <a:avLst/>
+          </a:prstGeom>
+          <a:solidFill>
+            <a:srgbClr val="26231F"/>
+          </a:solidFill>
+          <a:ln>
+            <a:noFill/>
+          </a:ln>
+        </p:spPr>
+        <p:txBody>
+          <a:bodyPr rtlCol="0" anchor="ctr"/>
+          <a:lstStyle/>
+          <a:p>
+            <a:pPr algn="ctr"/>
+          </a:p>
+        </p:txBody>
+      </p:sp>
+      <p:sp>
+        <p:nvSpPr>
+          <p:cNvPr id="4" name="하단 라벨"/>
+          <p:cNvSpPr txBox="1"/>
+          <p:nvPr/>
+        </p:nvSpPr>
+        <p:spPr>
+          <a:xfrm>
+            <a:off x="640080" y="6437376"/>
+            <a:ext cx="5486400" cy="274320"/>
           </a:xfrm>
           <a:prstGeom prst="rect">
             <a:avLst/>
           </a:prstGeom>
           <a:noFill/>
-          <a:ln w="28575">
-            <a:solidFill>
-              <a:srgbClr val="3EE0D2"/>
-            </a:solidFill>
-          </a:ln>
-        </p:spPr>
-        <p:txBody>
-          <a:bodyPr rtlCol="0" anchor="ctr"/>
-          <a:lstStyle/>
-          <a:p>
-            <a:pPr algn="ctr"/>
-          </a:p>
-        </p:txBody>
-      </p:sp>
-      <p:sp>
-        <p:nvSpPr>
-          <p:cNvPr id="4" name="장식"/>
+        </p:spPr>
+        <p:txBody>
+          <a:bodyPr wrap="square" lIns="54864" rIns="54864" tIns="27432" bIns="27432" anchor="ctr">
+            <a:noAutofit/>
+          </a:bodyPr>
+          <a:lstStyle/>
+          <a:p>
+            <a:pPr algn="l">
+              <a:lnSpc>
+                <a:spcPct val="115000"/>
+              </a:lnSpc>
+            </a:pPr>
+            <a:r>
+              <a:rPr sz="900" b="1" i="0" spc="250">
+                <a:solidFill>
+                  <a:srgbClr val="26231F"/>
+                </a:solidFill>
+              </a:rPr>
+              <a:t>CARD NEWS</a:t>
+            </a:r>
+          </a:p>
+        </p:txBody>
+      </p:sp>
+      <p:sp>
+        <p:nvSpPr>
+          <p:cNvPr id="5" name="포인트"/>
           <p:cNvSpPr/>
           <p:nvPr/>
         </p:nvSpPr>
         <p:spPr>
           <a:xfrm>
-            <a:off x="384048" y="384048"/>
-            <a:ext cx="6089904" cy="6089904"/>
-          </a:xfrm>
-          <a:prstGeom prst="rect">
+            <a:off x="5879592" y="6473952"/>
+            <a:ext cx="219456" cy="219456"/>
+          </a:xfrm>
+          <a:prstGeom prst="moon">
             <a:avLst/>
           </a:prstGeom>
-          <a:noFill/>
-          <a:ln w="9525">
-            <a:solidFill>
-              <a:srgbClr val="D9FCF9"/>
-            </a:solidFill>
+          <a:solidFill>
+            <a:srgbClr val="7BEAA9"/>
+          </a:solidFill>
+          <a:ln>
+            <a:noFill/>
           </a:ln>
         </p:spPr>
         <p:txBody>
@@ -3764,8 +3920,8 @@
         </p:nvSpPr>
         <p:spPr>
           <a:xfrm>
-            <a:off x="822960" y="548640"/>
-            <a:ext cx="3931920" cy="822960"/>
+            <a:off x="640080" y="502920"/>
+            <a:ext cx="5577840" cy="914400"/>
           </a:xfrm>
         </p:spPr>
         <p:txBody>
@@ -3782,7 +3938,7 @@
             <a:r>
               <a:rPr sz="2600" b="1" i="0">
                 <a:solidFill>
-                  <a:srgbClr val="126861"/>
+                  <a:srgbClr val="26231F"/>
                 </a:solidFill>
               </a:rPr>
               <a:t>카드 대신 현금 한 주</a:t>
@@ -3792,13 +3948,13 @@
       </p:sp>
       <p:sp>
         <p:nvSpPr>
-          <p:cNvPr id="5" name="번호"/>
+          <p:cNvPr id="6" name="번호"/>
           <p:cNvSpPr txBox="1"/>
           <p:nvPr/>
         </p:nvSpPr>
         <p:spPr>
           <a:xfrm>
-            <a:off x="822960" y="1645920"/>
+            <a:off x="640080" y="1691640"/>
             <a:ext cx="2194560" cy="1280160"/>
           </a:xfrm>
           <a:prstGeom prst="rect">
@@ -3820,7 +3976,7 @@
             <a:r>
               <a:rPr sz="6600" b="1" i="0">
                 <a:solidFill>
-                  <a:srgbClr val="3EE0D2"/>
+                  <a:srgbClr val="7BEAA9"/>
                 </a:solidFill>
               </a:rPr>
               <a:t>02</a:t>
@@ -3830,14 +3986,14 @@
       </p:sp>
       <p:sp>
         <p:nvSpPr>
-          <p:cNvPr id="6" name="본문"/>
+          <p:cNvPr id="7" name="본문"/>
           <p:cNvSpPr txBox="1"/>
           <p:nvPr/>
         </p:nvSpPr>
         <p:spPr>
           <a:xfrm>
-            <a:off x="822960" y="3108960"/>
-            <a:ext cx="5212079" cy="2651760"/>
+            <a:off x="640080" y="3154680"/>
+            <a:ext cx="5577840" cy="2651760"/>
           </a:xfrm>
           <a:prstGeom prst="rect">
             <a:avLst/>
@@ -3858,7 +4014,7 @@
             <a:r>
               <a:rPr sz="2800" b="0" i="0">
                 <a:solidFill>
-                  <a:srgbClr val="2B2B2B"/>
+                  <a:srgbClr val="26231F"/>
                 </a:solidFill>
               </a:rPr>
               <a:t>일주일만 현금으로 써 보면 충동구매가 눈에 띄게 줄어요.</a:t>
@@ -3868,14 +4024,14 @@
       </p:sp>
       <p:sp>
         <p:nvSpPr>
-          <p:cNvPr id="7" name="쪽 번호"/>
+          <p:cNvPr id="8" name="쪽 번호"/>
           <p:cNvSpPr txBox="1"/>
           <p:nvPr/>
         </p:nvSpPr>
         <p:spPr>
           <a:xfrm>
-            <a:off x="822960" y="5806440"/>
-            <a:ext cx="5212079" cy="365760"/>
+            <a:off x="640080" y="5806440"/>
+            <a:ext cx="5577840" cy="365760"/>
           </a:xfrm>
           <a:prstGeom prst="rect">
             <a:avLst/>
@@ -3918,7 +4074,7 @@
     <p:bg>
       <p:bgPr>
         <a:solidFill>
-          <a:srgbClr val="F4FDFD"/>
+          <a:srgbClr val="EAFDF2"/>
         </a:solidFill>
         <a:effectLst/>
       </p:bgPr>
@@ -3938,46 +4094,84 @@
         </p:nvSpPr>
         <p:spPr>
           <a:xfrm>
-            <a:off x="256032" y="256032"/>
-            <a:ext cx="6345936" cy="6345936"/>
+            <a:off x="640080" y="6400800"/>
+            <a:ext cx="5577840" cy="10972"/>
+          </a:xfrm>
+          <a:prstGeom prst="rect">
+            <a:avLst/>
+          </a:prstGeom>
+          <a:solidFill>
+            <a:srgbClr val="26231F"/>
+          </a:solidFill>
+          <a:ln>
+            <a:noFill/>
+          </a:ln>
+        </p:spPr>
+        <p:txBody>
+          <a:bodyPr rtlCol="0" anchor="ctr"/>
+          <a:lstStyle/>
+          <a:p>
+            <a:pPr algn="ctr"/>
+          </a:p>
+        </p:txBody>
+      </p:sp>
+      <p:sp>
+        <p:nvSpPr>
+          <p:cNvPr id="4" name="하단 라벨"/>
+          <p:cNvSpPr txBox="1"/>
+          <p:nvPr/>
+        </p:nvSpPr>
+        <p:spPr>
+          <a:xfrm>
+            <a:off x="640080" y="6437376"/>
+            <a:ext cx="5486400" cy="274320"/>
           </a:xfrm>
           <a:prstGeom prst="rect">
             <a:avLst/>
           </a:prstGeom>
           <a:noFill/>
-          <a:ln w="28575">
-            <a:solidFill>
-              <a:srgbClr val="3EE0D2"/>
-            </a:solidFill>
-          </a:ln>
-        </p:spPr>
-        <p:txBody>
-          <a:bodyPr rtlCol="0" anchor="ctr"/>
-          <a:lstStyle/>
-          <a:p>
-            <a:pPr algn="ctr"/>
-          </a:p>
-        </p:txBody>
-      </p:sp>
-      <p:sp>
-        <p:nvSpPr>
-          <p:cNvPr id="4" name="장식"/>
+        </p:spPr>
+        <p:txBody>
+          <a:bodyPr wrap="square" lIns="54864" rIns="54864" tIns="27432" bIns="27432" anchor="ctr">
+            <a:noAutofit/>
+          </a:bodyPr>
+          <a:lstStyle/>
+          <a:p>
+            <a:pPr algn="l">
+              <a:lnSpc>
+                <a:spcPct val="115000"/>
+              </a:lnSpc>
+            </a:pPr>
+            <a:r>
+              <a:rPr sz="900" b="1" i="0" spc="250">
+                <a:solidFill>
+                  <a:srgbClr val="26231F"/>
+                </a:solidFill>
+              </a:rPr>
+              <a:t>CARD NEWS</a:t>
+            </a:r>
+          </a:p>
+        </p:txBody>
+      </p:sp>
+      <p:sp>
+        <p:nvSpPr>
+          <p:cNvPr id="5" name="포인트"/>
           <p:cNvSpPr/>
           <p:nvPr/>
         </p:nvSpPr>
         <p:spPr>
           <a:xfrm>
-            <a:off x="384048" y="384048"/>
-            <a:ext cx="6089904" cy="6089904"/>
-          </a:xfrm>
-          <a:prstGeom prst="rect">
+            <a:off x="5879592" y="6473952"/>
+            <a:ext cx="219456" cy="219456"/>
+          </a:xfrm>
+          <a:prstGeom prst="moon">
             <a:avLst/>
           </a:prstGeom>
-          <a:noFill/>
-          <a:ln w="9525">
-            <a:solidFill>
-              <a:srgbClr val="D9FCF9"/>
-            </a:solidFill>
+          <a:solidFill>
+            <a:srgbClr val="7BEAA9"/>
+          </a:solidFill>
+          <a:ln>
+            <a:noFill/>
           </a:ln>
         </p:spPr>
         <p:txBody>
@@ -4000,8 +4194,8 @@
         </p:nvSpPr>
         <p:spPr>
           <a:xfrm>
-            <a:off x="822960" y="548640"/>
-            <a:ext cx="3931920" cy="822960"/>
+            <a:off x="640080" y="502920"/>
+            <a:ext cx="5577840" cy="914400"/>
           </a:xfrm>
         </p:spPr>
         <p:txBody>
@@ -4018,7 +4212,7 @@
             <a:r>
               <a:rPr sz="2600" b="1" i="0">
                 <a:solidFill>
-                  <a:srgbClr val="126861"/>
+                  <a:srgbClr val="26231F"/>
                 </a:solidFill>
               </a:rPr>
               <a:t>장보기 전 냉장고 사진</a:t>
@@ -4028,13 +4222,13 @@
       </p:sp>
       <p:sp>
         <p:nvSpPr>
-          <p:cNvPr id="5" name="번호"/>
+          <p:cNvPr id="6" name="번호"/>
           <p:cNvSpPr txBox="1"/>
           <p:nvPr/>
         </p:nvSpPr>
         <p:spPr>
           <a:xfrm>
-            <a:off x="822960" y="1645920"/>
+            <a:off x="640080" y="1691640"/>
             <a:ext cx="2194560" cy="1280160"/>
           </a:xfrm>
           <a:prstGeom prst="rect">
@@ -4056,7 +4250,7 @@
             <a:r>
               <a:rPr sz="6600" b="1" i="0">
                 <a:solidFill>
-                  <a:srgbClr val="3EE0D2"/>
+                  <a:srgbClr val="7BEAA9"/>
                 </a:solidFill>
               </a:rPr>
               <a:t>03</a:t>
@@ -4066,14 +4260,14 @@
       </p:sp>
       <p:sp>
         <p:nvSpPr>
-          <p:cNvPr id="6" name="본문"/>
+          <p:cNvPr id="7" name="본문"/>
           <p:cNvSpPr txBox="1"/>
           <p:nvPr/>
         </p:nvSpPr>
         <p:spPr>
           <a:xfrm>
-            <a:off x="822960" y="3108960"/>
-            <a:ext cx="5212079" cy="2651760"/>
+            <a:off x="640080" y="3154680"/>
+            <a:ext cx="5577840" cy="2651760"/>
           </a:xfrm>
           <a:prstGeom prst="rect">
             <a:avLst/>
@@ -4094,7 +4288,7 @@
             <a:r>
               <a:rPr sz="2800" b="0" i="0">
                 <a:solidFill>
-                  <a:srgbClr val="2B2B2B"/>
+                  <a:srgbClr val="26231F"/>
                 </a:solidFill>
               </a:rPr>
               <a:t>있는 재료를 확인하고 가면 같은 식재료를 또 사는 일이 줄어요.</a:t>
@@ -4104,14 +4298,14 @@
       </p:sp>
       <p:sp>
         <p:nvSpPr>
-          <p:cNvPr id="7" name="쪽 번호"/>
+          <p:cNvPr id="8" name="쪽 번호"/>
           <p:cNvSpPr txBox="1"/>
           <p:nvPr/>
         </p:nvSpPr>
         <p:spPr>
           <a:xfrm>
-            <a:off x="822960" y="5806440"/>
-            <a:ext cx="5212079" cy="365760"/>
+            <a:off x="640080" y="5806440"/>
+            <a:ext cx="5577840" cy="365760"/>
           </a:xfrm>
           <a:prstGeom prst="rect">
             <a:avLst/>
@@ -4154,7 +4348,7 @@
     <p:bg>
       <p:bgPr>
         <a:solidFill>
-          <a:srgbClr val="F4FDFD"/>
+          <a:srgbClr val="EAFDF2"/>
         </a:solidFill>
         <a:effectLst/>
       </p:bgPr>
@@ -4174,46 +4368,84 @@
         </p:nvSpPr>
         <p:spPr>
           <a:xfrm>
-            <a:off x="256032" y="256032"/>
-            <a:ext cx="6345936" cy="6345936"/>
+            <a:off x="640080" y="6400800"/>
+            <a:ext cx="5577840" cy="10972"/>
+          </a:xfrm>
+          <a:prstGeom prst="rect">
+            <a:avLst/>
+          </a:prstGeom>
+          <a:solidFill>
+            <a:srgbClr val="26231F"/>
+          </a:solidFill>
+          <a:ln>
+            <a:noFill/>
+          </a:ln>
+        </p:spPr>
+        <p:txBody>
+          <a:bodyPr rtlCol="0" anchor="ctr"/>
+          <a:lstStyle/>
+          <a:p>
+            <a:pPr algn="ctr"/>
+          </a:p>
+        </p:txBody>
+      </p:sp>
+      <p:sp>
+        <p:nvSpPr>
+          <p:cNvPr id="4" name="하단 라벨"/>
+          <p:cNvSpPr txBox="1"/>
+          <p:nvPr/>
+        </p:nvSpPr>
+        <p:spPr>
+          <a:xfrm>
+            <a:off x="640080" y="6437376"/>
+            <a:ext cx="5486400" cy="274320"/>
           </a:xfrm>
           <a:prstGeom prst="rect">
             <a:avLst/>
           </a:prstGeom>
           <a:noFill/>
-          <a:ln w="28575">
-            <a:solidFill>
-              <a:srgbClr val="3EE0D2"/>
-            </a:solidFill>
-          </a:ln>
-        </p:spPr>
-        <p:txBody>
-          <a:bodyPr rtlCol="0" anchor="ctr"/>
-          <a:lstStyle/>
-          <a:p>
-            <a:pPr algn="ctr"/>
-          </a:p>
-        </p:txBody>
-      </p:sp>
-      <p:sp>
-        <p:nvSpPr>
-          <p:cNvPr id="4" name="장식"/>
+        </p:spPr>
+        <p:txBody>
+          <a:bodyPr wrap="square" lIns="54864" rIns="54864" tIns="27432" bIns="27432" anchor="ctr">
+            <a:noAutofit/>
+          </a:bodyPr>
+          <a:lstStyle/>
+          <a:p>
+            <a:pPr algn="l">
+              <a:lnSpc>
+                <a:spcPct val="115000"/>
+              </a:lnSpc>
+            </a:pPr>
+            <a:r>
+              <a:rPr sz="900" b="1" i="0" spc="250">
+                <a:solidFill>
+                  <a:srgbClr val="26231F"/>
+                </a:solidFill>
+              </a:rPr>
+              <a:t>CARD NEWS</a:t>
+            </a:r>
+          </a:p>
+        </p:txBody>
+      </p:sp>
+      <p:sp>
+        <p:nvSpPr>
+          <p:cNvPr id="5" name="포인트"/>
           <p:cNvSpPr/>
           <p:nvPr/>
         </p:nvSpPr>
         <p:spPr>
           <a:xfrm>
-            <a:off x="384048" y="384048"/>
-            <a:ext cx="6089904" cy="6089904"/>
-          </a:xfrm>
-          <a:prstGeom prst="rect">
+            <a:off x="5879592" y="6473952"/>
+            <a:ext cx="219456" cy="219456"/>
+          </a:xfrm>
+          <a:prstGeom prst="moon">
             <a:avLst/>
           </a:prstGeom>
-          <a:noFill/>
-          <a:ln w="9525">
-            <a:solidFill>
-              <a:srgbClr val="D9FCF9"/>
-            </a:solidFill>
+          <a:solidFill>
+            <a:srgbClr val="7BEAA9"/>
+          </a:solidFill>
+          <a:ln>
+            <a:noFill/>
           </a:ln>
         </p:spPr>
         <p:txBody>
@@ -4236,8 +4468,8 @@
         </p:nvSpPr>
         <p:spPr>
           <a:xfrm>
-            <a:off x="822960" y="548640"/>
-            <a:ext cx="3931920" cy="822960"/>
+            <a:off x="640080" y="502920"/>
+            <a:ext cx="5577840" cy="914400"/>
           </a:xfrm>
         </p:spPr>
         <p:txBody>
@@ -4254,7 +4486,7 @@
             <a:r>
               <a:rPr sz="2600" b="1" i="0">
                 <a:solidFill>
-                  <a:srgbClr val="126861"/>
+                  <a:srgbClr val="26231F"/>
                 </a:solidFill>
               </a:rPr>
               <a:t>작은 목표 통장 만들기</a:t>
@@ -4264,13 +4496,13 @@
       </p:sp>
       <p:sp>
         <p:nvSpPr>
-          <p:cNvPr id="5" name="번호"/>
+          <p:cNvPr id="6" name="번호"/>
           <p:cNvSpPr txBox="1"/>
           <p:nvPr/>
         </p:nvSpPr>
         <p:spPr>
           <a:xfrm>
-            <a:off x="822960" y="1645920"/>
+            <a:off x="640080" y="1691640"/>
             <a:ext cx="2194560" cy="1280160"/>
           </a:xfrm>
           <a:prstGeom prst="rect">
@@ -4292,7 +4524,7 @@
             <a:r>
               <a:rPr sz="6600" b="1" i="0">
                 <a:solidFill>
-                  <a:srgbClr val="3EE0D2"/>
+                  <a:srgbClr val="7BEAA9"/>
                 </a:solidFill>
               </a:rPr>
               <a:t>04</a:t>
@@ -4302,14 +4534,14 @@
       </p:sp>
       <p:sp>
         <p:nvSpPr>
-          <p:cNvPr id="6" name="본문"/>
+          <p:cNvPr id="7" name="본문"/>
           <p:cNvSpPr txBox="1"/>
           <p:nvPr/>
         </p:nvSpPr>
         <p:spPr>
           <a:xfrm>
-            <a:off x="822960" y="3108960"/>
-            <a:ext cx="5212079" cy="2651760"/>
+            <a:off x="640080" y="3154680"/>
+            <a:ext cx="5577840" cy="2651760"/>
           </a:xfrm>
           <a:prstGeom prst="rect">
             <a:avLst/>
@@ -4330,7 +4562,7 @@
             <a:r>
               <a:rPr sz="2800" b="0" i="0">
                 <a:solidFill>
-                  <a:srgbClr val="2B2B2B"/>
+                  <a:srgbClr val="26231F"/>
                 </a:solidFill>
               </a:rPr>
               <a:t>여행·선물·비상금처럼 이름을 붙이면 모으는 재미가 커져요.</a:t>
@@ -4340,14 +4572,14 @@
       </p:sp>
       <p:sp>
         <p:nvSpPr>
-          <p:cNvPr id="7" name="쪽 번호"/>
+          <p:cNvPr id="8" name="쪽 번호"/>
           <p:cNvSpPr txBox="1"/>
           <p:nvPr/>
         </p:nvSpPr>
         <p:spPr>
           <a:xfrm>
-            <a:off x="822960" y="5806440"/>
-            <a:ext cx="5212079" cy="365760"/>
+            <a:off x="640080" y="5806440"/>
+            <a:ext cx="5577840" cy="365760"/>
           </a:xfrm>
           <a:prstGeom prst="rect">
             <a:avLst/>
@@ -4390,7 +4622,7 @@
     <p:bg>
       <p:bgPr>
         <a:solidFill>
-          <a:srgbClr val="F4FDFD"/>
+          <a:srgbClr val="EAFDF2"/>
         </a:solidFill>
         <a:effectLst/>
       </p:bgPr>
@@ -4410,46 +4642,84 @@
         </p:nvSpPr>
         <p:spPr>
           <a:xfrm>
-            <a:off x="256032" y="256032"/>
-            <a:ext cx="6345936" cy="6345936"/>
+            <a:off x="640080" y="6400800"/>
+            <a:ext cx="5577840" cy="10972"/>
+          </a:xfrm>
+          <a:prstGeom prst="rect">
+            <a:avLst/>
+          </a:prstGeom>
+          <a:solidFill>
+            <a:srgbClr val="26231F"/>
+          </a:solidFill>
+          <a:ln>
+            <a:noFill/>
+          </a:ln>
+        </p:spPr>
+        <p:txBody>
+          <a:bodyPr rtlCol="0" anchor="ctr"/>
+          <a:lstStyle/>
+          <a:p>
+            <a:pPr algn="ctr"/>
+          </a:p>
+        </p:txBody>
+      </p:sp>
+      <p:sp>
+        <p:nvSpPr>
+          <p:cNvPr id="4" name="하단 라벨"/>
+          <p:cNvSpPr txBox="1"/>
+          <p:nvPr/>
+        </p:nvSpPr>
+        <p:spPr>
+          <a:xfrm>
+            <a:off x="640080" y="6437376"/>
+            <a:ext cx="5486400" cy="274320"/>
           </a:xfrm>
           <a:prstGeom prst="rect">
             <a:avLst/>
           </a:prstGeom>
           <a:noFill/>
-          <a:ln w="28575">
-            <a:solidFill>
-              <a:srgbClr val="3EE0D2"/>
-            </a:solidFill>
-          </a:ln>
-        </p:spPr>
-        <p:txBody>
-          <a:bodyPr rtlCol="0" anchor="ctr"/>
-          <a:lstStyle/>
-          <a:p>
-            <a:pPr algn="ctr"/>
-          </a:p>
-        </p:txBody>
-      </p:sp>
-      <p:sp>
-        <p:nvSpPr>
-          <p:cNvPr id="4" name="장식"/>
+        </p:spPr>
+        <p:txBody>
+          <a:bodyPr wrap="square" lIns="54864" rIns="54864" tIns="27432" bIns="27432" anchor="ctr">
+            <a:noAutofit/>
+          </a:bodyPr>
+          <a:lstStyle/>
+          <a:p>
+            <a:pPr algn="l">
+              <a:lnSpc>
+                <a:spcPct val="115000"/>
+              </a:lnSpc>
+            </a:pPr>
+            <a:r>
+              <a:rPr sz="900" b="1" i="0" spc="250">
+                <a:solidFill>
+                  <a:srgbClr val="26231F"/>
+                </a:solidFill>
+              </a:rPr>
+              <a:t>CARD NEWS</a:t>
+            </a:r>
+          </a:p>
+        </p:txBody>
+      </p:sp>
+      <p:sp>
+        <p:nvSpPr>
+          <p:cNvPr id="5" name="포인트"/>
           <p:cNvSpPr/>
           <p:nvPr/>
         </p:nvSpPr>
         <p:spPr>
           <a:xfrm>
-            <a:off x="384048" y="384048"/>
-            <a:ext cx="6089904" cy="6089904"/>
-          </a:xfrm>
-          <a:prstGeom prst="rect">
+            <a:off x="5879592" y="6473952"/>
+            <a:ext cx="219456" cy="219456"/>
+          </a:xfrm>
+          <a:prstGeom prst="moon">
             <a:avLst/>
           </a:prstGeom>
-          <a:noFill/>
-          <a:ln w="9525">
-            <a:solidFill>
-              <a:srgbClr val="D9FCF9"/>
-            </a:solidFill>
+          <a:solidFill>
+            <a:srgbClr val="7BEAA9"/>
+          </a:solidFill>
+          <a:ln>
+            <a:noFill/>
           </a:ln>
         </p:spPr>
         <p:txBody>
@@ -4472,8 +4742,8 @@
         </p:nvSpPr>
         <p:spPr>
           <a:xfrm>
-            <a:off x="822960" y="548640"/>
-            <a:ext cx="3931920" cy="822960"/>
+            <a:off x="640080" y="502920"/>
+            <a:ext cx="5577840" cy="914400"/>
           </a:xfrm>
         </p:spPr>
         <p:txBody>
@@ -4490,7 +4760,7 @@
             <a:r>
               <a:rPr sz="2600" b="1" i="0">
                 <a:solidFill>
-                  <a:srgbClr val="126861"/>
+                  <a:srgbClr val="26231F"/>
                 </a:solidFill>
               </a:rPr>
               <a:t>주말 5분 가계부</a:t>
@@ -4500,13 +4770,13 @@
       </p:sp>
       <p:sp>
         <p:nvSpPr>
-          <p:cNvPr id="5" name="번호"/>
+          <p:cNvPr id="6" name="번호"/>
           <p:cNvSpPr txBox="1"/>
           <p:nvPr/>
         </p:nvSpPr>
         <p:spPr>
           <a:xfrm>
-            <a:off x="822960" y="1645920"/>
+            <a:off x="640080" y="1691640"/>
             <a:ext cx="2194560" cy="1280160"/>
           </a:xfrm>
           <a:prstGeom prst="rect">
@@ -4528,7 +4798,7 @@
             <a:r>
               <a:rPr sz="6600" b="1" i="0">
                 <a:solidFill>
-                  <a:srgbClr val="3EE0D2"/>
+                  <a:srgbClr val="7BEAA9"/>
                 </a:solidFill>
               </a:rPr>
               <a:t>05</a:t>
@@ -4538,14 +4808,14 @@
       </p:sp>
       <p:sp>
         <p:nvSpPr>
-          <p:cNvPr id="6" name="본문"/>
+          <p:cNvPr id="7" name="본문"/>
           <p:cNvSpPr txBox="1"/>
           <p:nvPr/>
         </p:nvSpPr>
         <p:spPr>
           <a:xfrm>
-            <a:off x="822960" y="3108960"/>
-            <a:ext cx="5212079" cy="2651760"/>
+            <a:off x="640080" y="3154680"/>
+            <a:ext cx="5577840" cy="2651760"/>
           </a:xfrm>
           <a:prstGeom prst="rect">
             <a:avLst/>
@@ -4566,7 +4836,7 @@
             <a:r>
               <a:rPr sz="2800" b="0" i="0">
                 <a:solidFill>
-                  <a:srgbClr val="2B2B2B"/>
+                  <a:srgbClr val="26231F"/>
                 </a:solidFill>
               </a:rPr>
               <a:t>영수증을 모아 두었다가 주말에 5분만 적어 보세요.</a:t>
@@ -4576,14 +4846,14 @@
       </p:sp>
       <p:sp>
         <p:nvSpPr>
-          <p:cNvPr id="7" name="쪽 번호"/>
+          <p:cNvPr id="8" name="쪽 번호"/>
           <p:cNvSpPr txBox="1"/>
           <p:nvPr/>
         </p:nvSpPr>
         <p:spPr>
           <a:xfrm>
-            <a:off x="822960" y="5806440"/>
-            <a:ext cx="5212079" cy="365760"/>
+            <a:off x="640080" y="5806440"/>
+            <a:ext cx="5577840" cy="365760"/>
           </a:xfrm>
           <a:prstGeom prst="rect">
             <a:avLst/>
@@ -4623,6 +4893,14 @@
 <file path=ppt/slides/slide7.xml><?xml version="1.0" encoding="utf-8"?>
 <p:sld xmlns:a="http://schemas.openxmlformats.org/drawingml/2006/main" xmlns:p="http://schemas.openxmlformats.org/presentationml/2006/main" xmlns:r="http://schemas.openxmlformats.org/officeDocument/2006/relationships">
   <p:cSld>
+    <p:bg>
+      <p:bgPr>
+        <a:solidFill>
+          <a:srgbClr val="274935"/>
+        </a:solidFill>
+        <a:effectLst/>
+      </p:bgPr>
+    </p:bg>
     <p:spTree>
       <p:nvGrpSpPr>
         <p:cNvPr id="1" name=""/>
@@ -4630,30 +4908,102 @@
         <p:nvPr/>
       </p:nvGrpSpPr>
       <p:grpSpPr/>
-      <p:pic>
-        <p:nvPicPr>
-          <p:cNvPr id="3" name="표지 그림" descr="news-16.jpg"/>
-          <p:cNvPicPr>
-            <a:picLocks noChangeAspect="1"/>
-          </p:cNvPicPr>
+      <p:sp>
+        <p:nvSpPr>
+          <p:cNvPr id="3" name="장식"/>
+          <p:cNvSpPr/>
           <p:nvPr/>
-        </p:nvPicPr>
-        <p:blipFill>
-          <a:blip r:embed="rId2"/>
-          <a:stretch>
-            <a:fillRect/>
-          </a:stretch>
-        </p:blipFill>
-        <p:spPr>
-          <a:xfrm>
-            <a:off x="0" y="0"/>
-            <a:ext cx="6858000" cy="6858000"/>
+        </p:nvSpPr>
+        <p:spPr>
+          <a:xfrm>
+            <a:off x="1600200" y="822960"/>
+            <a:ext cx="3657600" cy="3657600"/>
+          </a:xfrm>
+          <a:prstGeom prst="ellipse">
+            <a:avLst/>
+          </a:prstGeom>
+          <a:solidFill>
+            <a:srgbClr val="7BEAA9"/>
+          </a:solidFill>
+          <a:ln>
+            <a:noFill/>
+          </a:ln>
+        </p:spPr>
+        <p:txBody>
+          <a:bodyPr rtlCol="0" anchor="ctr"/>
+          <a:lstStyle/>
+          <a:p>
+            <a:pPr algn="ctr"/>
+          </a:p>
+        </p:txBody>
+      </p:sp>
+      <p:sp>
+        <p:nvSpPr>
+          <p:cNvPr id="4" name="장식"/>
+          <p:cNvSpPr/>
+          <p:nvPr/>
+        </p:nvSpPr>
+        <p:spPr>
+          <a:xfrm>
+            <a:off x="3246120" y="502920"/>
+            <a:ext cx="822960" cy="822960"/>
+          </a:xfrm>
+          <a:prstGeom prst="ellipse">
+            <a:avLst/>
+          </a:prstGeom>
+          <a:solidFill>
+            <a:srgbClr val="5EB280"/>
+          </a:solidFill>
+          <a:ln>
+            <a:noFill/>
+          </a:ln>
+        </p:spPr>
+        <p:txBody>
+          <a:bodyPr rtlCol="0" anchor="ctr"/>
+          <a:lstStyle/>
+          <a:p>
+            <a:pPr algn="ctr"/>
+          </a:p>
+        </p:txBody>
+      </p:sp>
+      <p:sp>
+        <p:nvSpPr>
+          <p:cNvPr id="5" name="라벨"/>
+          <p:cNvSpPr txBox="1"/>
+          <p:nvPr/>
+        </p:nvSpPr>
+        <p:spPr>
+          <a:xfrm>
+            <a:off x="731520" y="4572000"/>
+            <a:ext cx="5394960" cy="274320"/>
           </a:xfrm>
           <a:prstGeom prst="rect">
             <a:avLst/>
           </a:prstGeom>
-        </p:spPr>
-      </p:pic>
+          <a:noFill/>
+        </p:spPr>
+        <p:txBody>
+          <a:bodyPr wrap="square" lIns="54864" rIns="54864" tIns="27432" bIns="27432" anchor="t">
+            <a:noAutofit/>
+          </a:bodyPr>
+          <a:lstStyle/>
+          <a:p>
+            <a:pPr algn="ctr">
+              <a:lnSpc>
+                <a:spcPct val="115000"/>
+              </a:lnSpc>
+            </a:pPr>
+            <a:r>
+              <a:rPr sz="1000" b="1" i="0" spc="250">
+                <a:solidFill>
+                  <a:srgbClr val="FFFFFF"/>
+                </a:solidFill>
+              </a:rPr>
+              <a:t>CARD NEWS</a:t>
+            </a:r>
+          </a:p>
+        </p:txBody>
+      </p:sp>
       <p:sp>
         <p:nvSpPr>
           <p:cNvPr id="2" name="Title 1"/>
@@ -4666,8 +5016,8 @@
         </p:nvSpPr>
         <p:spPr>
           <a:xfrm>
-            <a:off x="685800" y="960120"/>
-            <a:ext cx="5486400" cy="1463040"/>
+            <a:off x="731520" y="4892040"/>
+            <a:ext cx="5394960" cy="914400"/>
           </a:xfrm>
         </p:spPr>
         <p:txBody>
@@ -4676,7 +5026,7 @@
           </a:bodyPr>
           <a:lstStyle/>
           <a:p>
-            <a:pPr algn="l">
+            <a:pPr algn="ctr">
               <a:lnSpc>
                 <a:spcPct val="105000"/>
               </a:lnSpc>
@@ -4684,7 +5034,7 @@
             <a:r>
               <a:rPr sz="2800" b="1" i="0">
                 <a:solidFill>
-                  <a:srgbClr val="126861"/>
+                  <a:srgbClr val="FFFFFF"/>
                 </a:solidFill>
               </a:rPr>
               <a:t>저장해 두고 필요할 때 꺼내 보세요</a:t>
@@ -4694,14 +5044,14 @@
       </p:sp>
       <p:sp>
         <p:nvSpPr>
-          <p:cNvPr id="4" name="한 줄 문구"/>
+          <p:cNvPr id="6" name="한 줄 문구"/>
           <p:cNvSpPr txBox="1"/>
           <p:nvPr/>
         </p:nvSpPr>
         <p:spPr>
           <a:xfrm>
-            <a:off x="685800" y="2560320"/>
-            <a:ext cx="5486400" cy="822960"/>
+            <a:off x="731520" y="5806440"/>
+            <a:ext cx="5394960" cy="822960"/>
           </a:xfrm>
           <a:prstGeom prst="rect">
             <a:avLst/>
@@ -4714,15 +5064,15 @@
           </a:bodyPr>
           <a:lstStyle/>
           <a:p>
-            <a:pPr algn="l">
+            <a:pPr algn="ctr">
               <a:lnSpc>
                 <a:spcPct val="115000"/>
               </a:lnSpc>
             </a:pPr>
             <a:r>
-              <a:rPr sz="1500" b="0" i="1">
+              <a:rPr sz="1500" b="0" i="0">
                 <a:solidFill>
-                  <a:srgbClr val="126861"/>
+                  <a:srgbClr val="FFFFFF"/>
                 </a:solidFill>
               </a:rPr>
               <a:t>마음에 들면 공유해 주세요</a:t>
@@ -4732,14 +5082,14 @@
       </p:sp>
       <p:sp>
         <p:nvSpPr>
-          <p:cNvPr id="5" name="안내 문구"/>
+          <p:cNvPr id="7" name="안내 문구"/>
           <p:cNvSpPr txBox="1"/>
           <p:nvPr/>
         </p:nvSpPr>
         <p:spPr>
           <a:xfrm>
-            <a:off x="685800" y="3429000"/>
-            <a:ext cx="5486400" cy="914400"/>
+            <a:off x="731520" y="6675120"/>
+            <a:ext cx="5394960" cy="914400"/>
           </a:xfrm>
           <a:prstGeom prst="rect">
             <a:avLst/>
@@ -4752,7 +5102,7 @@
           </a:bodyPr>
           <a:lstStyle/>
           <a:p>
-            <a:pPr algn="l">
+            <a:pPr algn="ctr">
               <a:lnSpc>
                 <a:spcPct val="115000"/>
               </a:lnSpc>
@@ -4760,7 +5110,7 @@
             <a:r>
               <a:rPr sz="1200" b="0" i="0">
                 <a:solidFill>
-                  <a:srgbClr val="666666"/>
+                  <a:srgbClr val="FFFFFF"/>
                 </a:solidFill>
               </a:rPr>
               <a:t>이름 · 연락처를 입력하세요</a:t>
@@ -4787,34 +5137,34 @@
         <a:sysClr val="window" lastClr="FFFFFF"/>
       </a:lt1>
       <a:dk2>
-        <a:srgbClr val="126861"/>
+        <a:srgbClr val="274935"/>
       </a:dk2>
       <a:lt2>
-        <a:srgbClr val="F4FDFD"/>
+        <a:srgbClr val="EAFDF2"/>
       </a:lt2>
       <a:accent1>
-        <a:srgbClr val="3EE0D2"/>
+        <a:srgbClr val="7BEAA9"/>
       </a:accent1>
       <a:accent2>
-        <a:srgbClr val="1CA8C4"/>
+        <a:srgbClr val="9FEFE6"/>
       </a:accent2>
       <a:accent3>
-        <a:srgbClr val="126861"/>
+        <a:srgbClr val="274935"/>
       </a:accent3>
       <a:accent4>
-        <a:srgbClr val="D9FCF9"/>
+        <a:srgbClr val="D1FAE2"/>
       </a:accent4>
       <a:accent5>
-        <a:srgbClr val="2DC4CB"/>
+        <a:srgbClr val="8DECC8"/>
       </a:accent5>
       <a:accent6>
-        <a:srgbClr val="71A4A0"/>
+        <a:srgbClr val="7D9286"/>
       </a:accent6>
       <a:hlink>
-        <a:srgbClr val="3EE0D2"/>
+        <a:srgbClr val="7BEAA9"/>
       </a:hlink>
       <a:folHlink>
-        <a:srgbClr val="126861"/>
+        <a:srgbClr val="274935"/>
       </a:folHlink>
     </a:clrScheme>
     <a:fontScheme name="Office">
